--- a/Fuglovics Konor/Szoftverfejlesztő- és tesztelő vizsgaremek.pptx
+++ b/Fuglovics Konor/Szoftverfejlesztő- és tesztelő vizsgaremek.pptx
@@ -12,6 +12,7 @@
     <p:sldId id="260" r:id="rId6"/>
     <p:sldId id="261" r:id="rId7"/>
     <p:sldId id="262" r:id="rId8"/>
+    <p:sldId id="264" r:id="rId9"/>
   </p:sldIdLst>
   <p:sldSz cx="9144000" cy="6858000" type="screen4x3"/>
   <p:notesSz cx="6858000" cy="9144000"/>
@@ -295,7 +296,7 @@
             <a:fld id="{7E1B2A62-5D5B-40FD-A574-BFE5DD367BE5}" type="datetimeFigureOut">
               <a:rPr lang="hu-HU" smtClean="0"/>
               <a:pPr/>
-              <a:t>2026. 03. 27.</a:t>
+              <a:t>2026. 04. 11.</a:t>
             </a:fld>
             <a:endParaRPr lang="hu-HU"/>
           </a:p>
@@ -462,7 +463,7 @@
             <a:fld id="{7E1B2A62-5D5B-40FD-A574-BFE5DD367BE5}" type="datetimeFigureOut">
               <a:rPr lang="hu-HU" smtClean="0"/>
               <a:pPr/>
-              <a:t>2026. 03. 27.</a:t>
+              <a:t>2026. 04. 11.</a:t>
             </a:fld>
             <a:endParaRPr lang="hu-HU"/>
           </a:p>
@@ -639,7 +640,7 @@
             <a:fld id="{7E1B2A62-5D5B-40FD-A574-BFE5DD367BE5}" type="datetimeFigureOut">
               <a:rPr lang="hu-HU" smtClean="0"/>
               <a:pPr/>
-              <a:t>2026. 03. 27.</a:t>
+              <a:t>2026. 04. 11.</a:t>
             </a:fld>
             <a:endParaRPr lang="hu-HU"/>
           </a:p>
@@ -806,7 +807,7 @@
             <a:fld id="{7E1B2A62-5D5B-40FD-A574-BFE5DD367BE5}" type="datetimeFigureOut">
               <a:rPr lang="hu-HU" smtClean="0"/>
               <a:pPr/>
-              <a:t>2026. 03. 27.</a:t>
+              <a:t>2026. 04. 11.</a:t>
             </a:fld>
             <a:endParaRPr lang="hu-HU"/>
           </a:p>
@@ -1049,7 +1050,7 @@
             <a:fld id="{7E1B2A62-5D5B-40FD-A574-BFE5DD367BE5}" type="datetimeFigureOut">
               <a:rPr lang="hu-HU" smtClean="0"/>
               <a:pPr/>
-              <a:t>2026. 03. 27.</a:t>
+              <a:t>2026. 04. 11.</a:t>
             </a:fld>
             <a:endParaRPr lang="hu-HU"/>
           </a:p>
@@ -1334,7 +1335,7 @@
             <a:fld id="{7E1B2A62-5D5B-40FD-A574-BFE5DD367BE5}" type="datetimeFigureOut">
               <a:rPr lang="hu-HU" smtClean="0"/>
               <a:pPr/>
-              <a:t>2026. 03. 27.</a:t>
+              <a:t>2026. 04. 11.</a:t>
             </a:fld>
             <a:endParaRPr lang="hu-HU"/>
           </a:p>
@@ -1753,7 +1754,7 @@
             <a:fld id="{7E1B2A62-5D5B-40FD-A574-BFE5DD367BE5}" type="datetimeFigureOut">
               <a:rPr lang="hu-HU" smtClean="0"/>
               <a:pPr/>
-              <a:t>2026. 03. 27.</a:t>
+              <a:t>2026. 04. 11.</a:t>
             </a:fld>
             <a:endParaRPr lang="hu-HU"/>
           </a:p>
@@ -1868,7 +1869,7 @@
             <a:fld id="{7E1B2A62-5D5B-40FD-A574-BFE5DD367BE5}" type="datetimeFigureOut">
               <a:rPr lang="hu-HU" smtClean="0"/>
               <a:pPr/>
-              <a:t>2026. 03. 27.</a:t>
+              <a:t>2026. 04. 11.</a:t>
             </a:fld>
             <a:endParaRPr lang="hu-HU"/>
           </a:p>
@@ -1960,7 +1961,7 @@
             <a:fld id="{7E1B2A62-5D5B-40FD-A574-BFE5DD367BE5}" type="datetimeFigureOut">
               <a:rPr lang="hu-HU" smtClean="0"/>
               <a:pPr/>
-              <a:t>2026. 03. 27.</a:t>
+              <a:t>2026. 04. 11.</a:t>
             </a:fld>
             <a:endParaRPr lang="hu-HU"/>
           </a:p>
@@ -2234,7 +2235,7 @@
             <a:fld id="{7E1B2A62-5D5B-40FD-A574-BFE5DD367BE5}" type="datetimeFigureOut">
               <a:rPr lang="hu-HU" smtClean="0"/>
               <a:pPr/>
-              <a:t>2026. 03. 27.</a:t>
+              <a:t>2026. 04. 11.</a:t>
             </a:fld>
             <a:endParaRPr lang="hu-HU"/>
           </a:p>
@@ -2484,7 +2485,7 @@
             <a:fld id="{7E1B2A62-5D5B-40FD-A574-BFE5DD367BE5}" type="datetimeFigureOut">
               <a:rPr lang="hu-HU" smtClean="0"/>
               <a:pPr/>
-              <a:t>2026. 03. 27.</a:t>
+              <a:t>2026. 04. 11.</a:t>
             </a:fld>
             <a:endParaRPr lang="hu-HU"/>
           </a:p>
@@ -2694,7 +2695,7 @@
             <a:fld id="{7E1B2A62-5D5B-40FD-A574-BFE5DD367BE5}" type="datetimeFigureOut">
               <a:rPr lang="hu-HU" smtClean="0"/>
               <a:pPr/>
-              <a:t>2026. 03. 27.</a:t>
+              <a:t>2026. 04. 11.</a:t>
             </a:fld>
             <a:endParaRPr lang="hu-HU"/>
           </a:p>
@@ -3083,15 +3084,11 @@
           <a:lstStyle/>
           <a:p>
             <a:r>
-              <a:rPr lang="hu-HU" smtClean="0"/>
-              <a:t>Szoftverfejlesztő</a:t>
-            </a:r>
-            <a:r>
-              <a:rPr lang="hu-HU" smtClean="0"/>
-              <a:t>- és tesztelő </a:t>
-            </a:r>
-            <a:r>
-              <a:rPr lang="hu-HU" smtClean="0"/>
+              <a:rPr lang="hu-HU" dirty="0" smtClean="0"/>
+              <a:t>Szoftverfejlesztő- és tesztelő </a:t>
+            </a:r>
+            <a:r>
+              <a:rPr lang="hu-HU" dirty="0" err="1" smtClean="0"/>
               <a:t>vizsgaremek</a:t>
             </a:r>
             <a:r>
@@ -3126,39 +3123,7 @@
           <a:p>
             <a:r>
               <a:rPr lang="hu-HU" smtClean="0"/>
-              <a:t>Fuglovics</a:t>
-            </a:r>
-            <a:r>
-              <a:rPr lang="hu-HU" smtClean="0"/>
-              <a:t> </a:t>
-            </a:r>
-            <a:r>
-              <a:rPr lang="hu-HU" smtClean="0"/>
-              <a:t>Konor</a:t>
-            </a:r>
-            <a:r>
-              <a:rPr lang="hu-HU" smtClean="0"/>
-              <a:t>, Uivárosi Katona </a:t>
-            </a:r>
-            <a:r>
-              <a:rPr lang="hu-HU" smtClean="0"/>
-              <a:t>Gábriel</a:t>
-            </a:r>
-            <a:r>
-              <a:rPr lang="hu-HU" smtClean="0"/>
-              <a:t>, Kiss-Fodor </a:t>
-            </a:r>
-            <a:r>
-              <a:rPr lang="hu-HU" smtClean="0"/>
-              <a:t>Zsombor</a:t>
-            </a:r>
-            <a:r>
-              <a:rPr lang="hu-HU" smtClean="0"/>
-              <a:t>, Szöllősy </a:t>
-            </a:r>
-            <a:r>
-              <a:rPr lang="hu-HU" smtClean="0"/>
-              <a:t>Marcell</a:t>
+              <a:t>Fuglovics Konor, Uivárosi Katona Gábriel, Kiss-Fodor Zsombor, Szöllősy Marcell</a:t>
             </a:r>
             <a:endParaRPr lang="hu-HU"/>
           </a:p>
@@ -3206,19 +3171,7 @@
           <a:p>
             <a:r>
               <a:rPr lang="hu-HU" smtClean="0"/>
-              <a:t>Uivárosi</a:t>
-            </a:r>
-            <a:r>
-              <a:rPr lang="hu-HU" smtClean="0"/>
-              <a:t> Katona </a:t>
-            </a:r>
-            <a:r>
-              <a:rPr lang="hu-HU" smtClean="0"/>
-              <a:t>Gábriel</a:t>
-            </a:r>
-            <a:r>
-              <a:rPr lang="hu-HU" smtClean="0"/>
-              <a:t>:</a:t>
+              <a:t>Uivárosi Katona Gábriel:</a:t>
             </a:r>
             <a:endParaRPr lang="hu-HU"/>
           </a:p>
@@ -3239,7 +3192,10 @@
           <a:bodyPr/>
           <a:lstStyle/>
           <a:p>
-            <a:endParaRPr lang="hu-HU"/>
+            <a:r>
+              <a:rPr lang="hu-HU" dirty="0" smtClean="0"/>
+              <a:t>Nekem az adatbázist kellet létrehoznom, a csapatársam által összegyűjtött adatokból.</a:t>
+            </a:r>
           </a:p>
         </p:txBody>
       </p:sp>
@@ -3285,39 +3241,37 @@
           <a:p>
             <a:r>
               <a:rPr lang="hu-HU" smtClean="0"/>
-              <a:t>Szöllősy</a:t>
-            </a:r>
+              <a:t>Szöllősy Marcell:</a:t>
+            </a:r>
+            <a:endParaRPr lang="hu-HU"/>
+          </a:p>
+        </p:txBody>
+      </p:sp>
+      <p:sp>
+        <p:nvSpPr>
+          <p:cNvPr id="3" name="Content Placeholder 2"/>
+          <p:cNvSpPr>
+            <a:spLocks noGrp="1"/>
+          </p:cNvSpPr>
+          <p:nvPr>
+            <p:ph idx="1"/>
+          </p:nvPr>
+        </p:nvSpPr>
+        <p:spPr/>
+        <p:txBody>
+          <a:bodyPr/>
+          <a:lstStyle/>
+          <a:p>
             <a:r>
               <a:rPr lang="hu-HU" smtClean="0"/>
-              <a:t> </a:t>
-            </a:r>
+              <a:t>Nekem az adatokat kellet összegyűjtenem.</a:t>
+            </a:r>
+          </a:p>
+          <a:p>
             <a:r>
               <a:rPr lang="hu-HU" smtClean="0"/>
-              <a:t>Marcell</a:t>
-            </a:r>
-            <a:r>
-              <a:rPr lang="hu-HU" smtClean="0"/>
-              <a:t>:</a:t>
-            </a:r>
-            <a:endParaRPr lang="hu-HU"/>
-          </a:p>
-        </p:txBody>
-      </p:sp>
-      <p:sp>
-        <p:nvSpPr>
-          <p:cNvPr id="3" name="Content Placeholder 2"/>
-          <p:cNvSpPr>
-            <a:spLocks noGrp="1"/>
-          </p:cNvSpPr>
-          <p:nvPr>
-            <p:ph idx="1"/>
-          </p:nvPr>
-        </p:nvSpPr>
-        <p:spPr/>
-        <p:txBody>
-          <a:bodyPr/>
-          <a:lstStyle/>
-          <a:p>
+              <a:t>Az adatokat egy szöveges fájlban gyűjtöttem össze, elrendezve.</a:t>
+            </a:r>
             <a:endParaRPr lang="hu-HU"/>
           </a:p>
         </p:txBody>
@@ -3364,15 +3318,7 @@
           <a:p>
             <a:r>
               <a:rPr lang="hu-HU" smtClean="0"/>
-              <a:t>Fuglovics</a:t>
-            </a:r>
-            <a:r>
-              <a:rPr lang="hu-HU" smtClean="0"/>
-              <a:t> </a:t>
-            </a:r>
-            <a:r>
-              <a:rPr lang="hu-HU" smtClean="0"/>
-              <a:t>Konor</a:t>
+              <a:t>Fuglovics Konor</a:t>
             </a:r>
             <a:endParaRPr lang="hu-HU"/>
           </a:p>
@@ -3394,30 +3340,10 @@
           <a:lstStyle/>
           <a:p>
             <a:r>
-              <a:rPr lang="hu-HU" smtClean="0"/>
-              <a:t>Én</a:t>
-            </a:r>
-            <a:r>
-              <a:rPr lang="hu-HU" smtClean="0"/>
-              <a:t> csináltam a prezentációt a </a:t>
-            </a:r>
-            <a:r>
-              <a:rPr lang="hu-HU" smtClean="0"/>
-              <a:t>projekthez</a:t>
-            </a:r>
-            <a:r>
-              <a:rPr lang="hu-HU" smtClean="0"/>
-              <a:t>, és segítettem a </a:t>
-            </a:r>
-            <a:r>
-              <a:rPr lang="hu-HU" smtClean="0"/>
-              <a:t>backendben</a:t>
-            </a:r>
-            <a:r>
-              <a:rPr lang="hu-HU" smtClean="0"/>
-              <a:t>.</a:t>
-            </a:r>
-            <a:endParaRPr lang="hu-HU"/>
+              <a:rPr lang="hu-HU" dirty="0" smtClean="0"/>
+              <a:t>Az én feladatom a prezentáció elkészítése volt a projekthez, és back endben megcsinálni az ár rendszert.</a:t>
+            </a:r>
+            <a:endParaRPr lang="hu-HU" dirty="0"/>
           </a:p>
         </p:txBody>
       </p:sp>
@@ -3462,29 +3388,59 @@
           <a:lstStyle/>
           <a:p>
             <a:r>
+              <a:rPr lang="hu-HU" dirty="0" smtClean="0"/>
+              <a:t>Kiss- Fodor Zsombor:</a:t>
+            </a:r>
+            <a:endParaRPr lang="hu-HU" dirty="0"/>
+          </a:p>
+        </p:txBody>
+      </p:sp>
+      <p:sp>
+        <p:nvSpPr>
+          <p:cNvPr id="3" name="Content Placeholder 2"/>
+          <p:cNvSpPr>
+            <a:spLocks noGrp="1"/>
+          </p:cNvSpPr>
+          <p:nvPr>
+            <p:ph idx="1"/>
+          </p:nvPr>
+        </p:nvSpPr>
+        <p:spPr/>
+        <p:txBody>
+          <a:bodyPr/>
+          <a:lstStyle/>
+          <a:p>
+            <a:r>
+              <a:rPr lang="hu-HU" dirty="0" smtClean="0"/>
+              <a:t>Én csináltam meg a frontendet.</a:t>
+            </a:r>
+          </a:p>
+          <a:p>
+            <a:r>
+              <a:rPr lang="hu-HU" dirty="0" smtClean="0"/>
+              <a:t>Használtam </a:t>
+            </a:r>
+            <a:r>
+              <a:rPr lang="hu-HU" dirty="0" err="1" smtClean="0"/>
+              <a:t>Bootstrap-et</a:t>
+            </a:r>
+            <a:r>
+              <a:rPr lang="hu-HU" dirty="0" smtClean="0"/>
+              <a:t>, hogy </a:t>
+            </a:r>
+            <a:r>
+              <a:rPr lang="hu-HU" dirty="0" err="1" smtClean="0"/>
+              <a:t>reszponzív</a:t>
+            </a:r>
+            <a:r>
+              <a:rPr lang="hu-HU" dirty="0" smtClean="0"/>
+              <a:t> legyen </a:t>
+            </a:r>
+            <a:r>
               <a:rPr lang="hu-HU" smtClean="0"/>
-              <a:t>Kiss-Fodor Zsombor:</a:t>
-            </a:r>
-            <a:endParaRPr lang="hu-HU"/>
-          </a:p>
-        </p:txBody>
-      </p:sp>
-      <p:sp>
-        <p:nvSpPr>
-          <p:cNvPr id="3" name="Content Placeholder 2"/>
-          <p:cNvSpPr>
-            <a:spLocks noGrp="1"/>
-          </p:cNvSpPr>
-          <p:nvPr>
-            <p:ph idx="1"/>
-          </p:nvPr>
-        </p:nvSpPr>
-        <p:spPr/>
-        <p:txBody>
-          <a:bodyPr/>
-          <a:lstStyle/>
-          <a:p>
-            <a:endParaRPr lang="hu-HU"/>
+              <a:t>a weboldal.</a:t>
+            </a:r>
+            <a:endParaRPr lang="en-US" dirty="0" smtClean="0"/>
           </a:p>
         </p:txBody>
       </p:sp>
@@ -3528,7 +3484,11 @@
           <a:bodyPr/>
           <a:lstStyle/>
           <a:p>
-            <a:endParaRPr lang="hu-HU"/>
+            <a:r>
+              <a:rPr lang="en-US" dirty="0" err="1" smtClean="0"/>
+              <a:t>Prezentáció</a:t>
+            </a:r>
+            <a:endParaRPr lang="hu-HU" dirty="0"/>
           </a:p>
         </p:txBody>
       </p:sp>
@@ -3549,52 +3509,14 @@
           <a:p>
             <a:r>
               <a:rPr lang="hu-HU" smtClean="0"/>
-              <a:t>Bemutatjuk</a:t>
-            </a:r>
+              <a:t>Bemutatjuk a Release the Mags nevű webshopot.</a:t>
+            </a:r>
+          </a:p>
+          <a:p>
             <a:r>
               <a:rPr lang="hu-HU" smtClean="0"/>
-              <a:t> a Release the Mags nevű </a:t>
-            </a:r>
-            <a:r>
-              <a:rPr lang="hu-HU" smtClean="0"/>
-              <a:t>webshopot.</a:t>
-            </a:r>
-            <a:endParaRPr lang="hu-HU" smtClean="0"/>
-          </a:p>
-          <a:p>
-            <a:r>
-              <a:rPr lang="hu-HU" smtClean="0"/>
-              <a:t>Egy </a:t>
-            </a:r>
-            <a:r>
-              <a:rPr lang="hu-HU" smtClean="0"/>
-              <a:t>weboldal</a:t>
-            </a:r>
-            <a:r>
-              <a:rPr lang="hu-HU" smtClean="0"/>
-              <a:t>, ahol </a:t>
-            </a:r>
-            <a:r>
-              <a:rPr lang="hu-HU" smtClean="0"/>
-              <a:t>fegyvereket</a:t>
-            </a:r>
-            <a:r>
-              <a:rPr lang="hu-HU" smtClean="0"/>
-              <a:t>, katonai </a:t>
-            </a:r>
-            <a:r>
-              <a:rPr lang="hu-HU" smtClean="0"/>
-              <a:t>felszereléseket</a:t>
-            </a:r>
-            <a:r>
-              <a:rPr lang="hu-HU" smtClean="0"/>
-              <a:t>, járműveket és kellékeket lehet </a:t>
-            </a:r>
-            <a:r>
-              <a:rPr lang="hu-HU" smtClean="0"/>
-              <a:t>vásárolni.</a:t>
-            </a:r>
-            <a:endParaRPr lang="hu-HU" smtClean="0"/>
+              <a:t>Egy weboldal, ahol fegyvereket, katonai felszereléseket, járműveket és kellékeket lehet vásárolni.</a:t>
+            </a:r>
           </a:p>
           <a:p>
             <a:r>
@@ -3603,23 +3525,7 @@
                   <a:srgbClr val="C00000"/>
                 </a:solidFill>
               </a:rPr>
-              <a:t>Fegyvereket csak fegyvertartási engedéllyel lehet vásárolni és ha 18 éves </a:t>
-            </a:r>
-            <a:r>
-              <a:rPr lang="hu-HU" b="1" smtClean="0">
-                <a:solidFill>
-                  <a:srgbClr val="C00000"/>
-                </a:solidFill>
-              </a:rPr>
-              <a:t>elmúlt</a:t>
-            </a:r>
-            <a:r>
-              <a:rPr lang="hu-HU" b="1" smtClean="0">
-                <a:solidFill>
-                  <a:srgbClr val="C00000"/>
-                </a:solidFill>
-              </a:rPr>
-              <a:t>!</a:t>
+              <a:t>Fegyvereket csak fegyvertartási engedéllyel lehet vásárolni és ha 18 éves elmúlt!</a:t>
             </a:r>
             <a:endParaRPr lang="hu-HU" b="1">
               <a:solidFill>
@@ -3671,15 +3577,7 @@
           <a:p>
             <a:r>
               <a:rPr lang="hu-HU" smtClean="0"/>
-              <a:t>Az</a:t>
-            </a:r>
-            <a:r>
-              <a:rPr lang="hu-HU" smtClean="0"/>
-              <a:t> oldal </a:t>
-            </a:r>
-            <a:r>
-              <a:rPr lang="hu-HU" smtClean="0"/>
-              <a:t>tuajdonságai</a:t>
+              <a:t>Az oldal tuajdonságai</a:t>
             </a:r>
             <a:endParaRPr lang="hu-HU"/>
           </a:p>
@@ -3701,9 +3599,257 @@
           <a:lstStyle/>
           <a:p>
             <a:pPr>
-              <a:buNone/>
+              <a:buFontTx/>
+              <a:buChar char="-"/>
             </a:pPr>
-            <a:endParaRPr lang="hu-HU"/>
+            <a:r>
+              <a:rPr lang="en-US" dirty="0" err="1" smtClean="0"/>
+              <a:t>Nem</a:t>
+            </a:r>
+            <a:r>
+              <a:rPr lang="en-US" dirty="0" smtClean="0"/>
+              <a:t> </a:t>
+            </a:r>
+            <a:r>
+              <a:rPr lang="en-US" dirty="0" err="1" smtClean="0"/>
+              <a:t>kell</a:t>
+            </a:r>
+            <a:r>
+              <a:rPr lang="en-US" dirty="0" smtClean="0"/>
+              <a:t> </a:t>
+            </a:r>
+            <a:r>
+              <a:rPr lang="en-US" dirty="0" err="1" smtClean="0"/>
+              <a:t>regisztrálni</a:t>
+            </a:r>
+            <a:endParaRPr lang="en-US" dirty="0" smtClean="0"/>
+          </a:p>
+          <a:p>
+            <a:pPr>
+              <a:buFontTx/>
+              <a:buChar char="-"/>
+            </a:pPr>
+            <a:r>
+              <a:rPr lang="en-US" dirty="0" err="1" smtClean="0"/>
+              <a:t>Gyors</a:t>
+            </a:r>
+            <a:r>
+              <a:rPr lang="en-US" dirty="0" smtClean="0"/>
+              <a:t> </a:t>
+            </a:r>
+            <a:r>
+              <a:rPr lang="en-US" dirty="0" err="1" smtClean="0"/>
+              <a:t>fizetés</a:t>
+            </a:r>
+            <a:endParaRPr lang="en-US" dirty="0" smtClean="0"/>
+          </a:p>
+          <a:p>
+            <a:pPr>
+              <a:buFontTx/>
+              <a:buChar char="-"/>
+            </a:pPr>
+            <a:r>
+              <a:rPr lang="en-US" dirty="0" smtClean="0"/>
+              <a:t>Nagy </a:t>
+            </a:r>
+            <a:r>
+              <a:rPr lang="en-US" dirty="0" err="1" smtClean="0"/>
+              <a:t>választék</a:t>
+            </a:r>
+            <a:endParaRPr lang="en-US" dirty="0" smtClean="0"/>
+          </a:p>
+          <a:p>
+            <a:pPr>
+              <a:buFontTx/>
+              <a:buChar char="-"/>
+            </a:pPr>
+            <a:r>
+              <a:rPr lang="en-US" dirty="0" err="1" smtClean="0"/>
+              <a:t>kibaszott</a:t>
+            </a:r>
+            <a:r>
+              <a:rPr lang="en-US" dirty="0" smtClean="0"/>
+              <a:t> </a:t>
+            </a:r>
+            <a:r>
+              <a:rPr lang="en-US" smtClean="0"/>
+              <a:t>szar</a:t>
+            </a:r>
+            <a:endParaRPr lang="hu-HU" dirty="0"/>
+          </a:p>
+        </p:txBody>
+      </p:sp>
+    </p:spTree>
+  </p:cSld>
+  <p:clrMapOvr>
+    <a:masterClrMapping/>
+  </p:clrMapOvr>
+</p:sld>
+</file>
+
+<file path=ppt/slides/slide8.xml><?xml version="1.0" encoding="utf-8"?>
+<p:sld xmlns:a="http://schemas.openxmlformats.org/drawingml/2006/main" xmlns:r="http://schemas.openxmlformats.org/officeDocument/2006/relationships" xmlns:p="http://schemas.openxmlformats.org/presentationml/2006/main">
+  <p:cSld>
+    <p:spTree>
+      <p:nvGrpSpPr>
+        <p:cNvPr id="1" name=""/>
+        <p:cNvGrpSpPr/>
+        <p:nvPr/>
+      </p:nvGrpSpPr>
+      <p:grpSpPr>
+        <a:xfrm>
+          <a:off x="0" y="0"/>
+          <a:ext cx="0" cy="0"/>
+          <a:chOff x="0" y="0"/>
+          <a:chExt cx="0" cy="0"/>
+        </a:xfrm>
+      </p:grpSpPr>
+      <p:sp>
+        <p:nvSpPr>
+          <p:cNvPr id="2" name="Title 1"/>
+          <p:cNvSpPr>
+            <a:spLocks noGrp="1"/>
+          </p:cNvSpPr>
+          <p:nvPr>
+            <p:ph type="title"/>
+          </p:nvPr>
+        </p:nvSpPr>
+        <p:spPr/>
+        <p:txBody>
+          <a:bodyPr>
+            <a:normAutofit/>
+          </a:bodyPr>
+          <a:lstStyle/>
+          <a:p>
+            <a:r>
+              <a:rPr lang="en-US" sz="3600" dirty="0" err="1" smtClean="0"/>
+              <a:t>Használt</a:t>
+            </a:r>
+            <a:r>
+              <a:rPr lang="en-US" sz="3600" dirty="0" smtClean="0"/>
+              <a:t> </a:t>
+            </a:r>
+            <a:r>
+              <a:rPr lang="en-US" sz="3600" dirty="0" err="1" smtClean="0"/>
+              <a:t>alkalmazások</a:t>
+            </a:r>
+            <a:r>
+              <a:rPr lang="en-US" sz="3600" dirty="0" smtClean="0"/>
+              <a:t>/</a:t>
+            </a:r>
+            <a:r>
+              <a:rPr lang="en-US" sz="3600" dirty="0" err="1" smtClean="0"/>
+              <a:t>programnyelvek</a:t>
+            </a:r>
+            <a:endParaRPr lang="hu-HU" sz="3600" dirty="0"/>
+          </a:p>
+        </p:txBody>
+      </p:sp>
+      <p:sp>
+        <p:nvSpPr>
+          <p:cNvPr id="3" name="Content Placeholder 2"/>
+          <p:cNvSpPr>
+            <a:spLocks noGrp="1"/>
+          </p:cNvSpPr>
+          <p:nvPr>
+            <p:ph idx="1"/>
+          </p:nvPr>
+        </p:nvSpPr>
+        <p:spPr/>
+        <p:txBody>
+          <a:bodyPr/>
+          <a:lstStyle/>
+          <a:p>
+            <a:r>
+              <a:rPr lang="en-US" dirty="0" smtClean="0"/>
+              <a:t>HTML, CSS, JavaScript – </a:t>
+            </a:r>
+            <a:r>
+              <a:rPr lang="en-US" dirty="0" err="1" smtClean="0"/>
+              <a:t>Weboldal</a:t>
+            </a:r>
+            <a:r>
+              <a:rPr lang="en-US" dirty="0" smtClean="0"/>
+              <a:t> </a:t>
+            </a:r>
+            <a:r>
+              <a:rPr lang="en-US" dirty="0" err="1" smtClean="0"/>
+              <a:t>elkészítése</a:t>
+            </a:r>
+            <a:endParaRPr lang="en-US" dirty="0" smtClean="0"/>
+          </a:p>
+          <a:p>
+            <a:r>
+              <a:rPr lang="en-US" dirty="0" smtClean="0"/>
+              <a:t>PHP, Apache – </a:t>
+            </a:r>
+            <a:r>
+              <a:rPr lang="en-US" dirty="0" err="1" smtClean="0"/>
+              <a:t>Adatbázis</a:t>
+            </a:r>
+            <a:r>
+              <a:rPr lang="en-US" dirty="0" smtClean="0"/>
+              <a:t> </a:t>
+            </a:r>
+            <a:r>
+              <a:rPr lang="en-US" dirty="0" err="1" smtClean="0"/>
+              <a:t>létrehozása</a:t>
+            </a:r>
+            <a:r>
+              <a:rPr lang="en-US" dirty="0" smtClean="0"/>
+              <a:t>, </a:t>
+            </a:r>
+            <a:r>
+              <a:rPr lang="en-US" dirty="0" err="1" smtClean="0"/>
+              <a:t>valamint</a:t>
+            </a:r>
+            <a:r>
+              <a:rPr lang="en-US" dirty="0" smtClean="0"/>
+              <a:t> a </a:t>
+            </a:r>
+            <a:r>
+              <a:rPr lang="en-US" dirty="0" err="1" smtClean="0"/>
+              <a:t>kigyűjtött</a:t>
+            </a:r>
+            <a:r>
+              <a:rPr lang="en-US" dirty="0" smtClean="0"/>
+              <a:t> </a:t>
+            </a:r>
+            <a:r>
+              <a:rPr lang="en-US" dirty="0" err="1" smtClean="0"/>
+              <a:t>adatok</a:t>
+            </a:r>
+            <a:r>
+              <a:rPr lang="en-US" dirty="0" smtClean="0"/>
+              <a:t> </a:t>
+            </a:r>
+            <a:r>
+              <a:rPr lang="en-US" dirty="0" err="1" smtClean="0"/>
+              <a:t>eltárolása</a:t>
+            </a:r>
+            <a:endParaRPr lang="en-US" dirty="0" smtClean="0"/>
+          </a:p>
+          <a:p>
+            <a:r>
+              <a:rPr lang="en-US" dirty="0" smtClean="0"/>
+              <a:t>Bootstrap – </a:t>
+            </a:r>
+            <a:r>
+              <a:rPr lang="en-US" dirty="0" err="1" smtClean="0"/>
+              <a:t>Weboldal</a:t>
+            </a:r>
+            <a:r>
+              <a:rPr lang="en-US" dirty="0" smtClean="0"/>
+              <a:t> </a:t>
+            </a:r>
+            <a:r>
+              <a:rPr lang="en-US" dirty="0" err="1" smtClean="0"/>
+              <a:t>dizájn</a:t>
+            </a:r>
+            <a:endParaRPr lang="en-US" dirty="0" smtClean="0"/>
+          </a:p>
+          <a:p>
+            <a:endParaRPr lang="hu-HU" dirty="0"/>
           </a:p>
         </p:txBody>
       </p:sp>
@@ -3720,10 +3866,10 @@
   <a:themeElements>
     <a:clrScheme name="Office">
       <a:dk1>
-        <a:sysClr val="windowText" lastClr="000000"/>
+        <a:sysClr val="windowText" lastClr="E0E4EC"/>
       </a:dk1>
       <a:lt1>
-        <a:sysClr val="window" lastClr="FFFFFF"/>
+        <a:sysClr val="window" lastClr="191919"/>
       </a:lt1>
       <a:dk2>
         <a:srgbClr val="1F497D"/>
